--- a/presentations/GroupNo_07_Prompt_Strategy_Comparison.pptx
+++ b/presentations/GroupNo_07_Prompt_Strategy_Comparison.pptx
@@ -713,9 +713,7 @@
           <a:bodyPr/>
           <a:lstStyle/>
           <a:p>
-            <a:r>
-              <a:t>~2 minutes. No trainable classifier is fitted; TF-IDF is used only to select demonstrations. Explain macro averaging: each class gets equal weight. Output parsing maps category names to IDs, and invalid outputs are counted as wrong.</a:t>
-            </a:r>
+            <a:endParaRPr dirty="0"/>
           </a:p>
         </p:txBody>
       </p:sp>
@@ -1122,7 +1120,7 @@
           <a:p>
             <a:fld id="{5BCAD085-E8A6-8845-BD4E-CB4CCA059FC4}" type="datetimeFigureOut">
               <a:rPr lang="en-US" smtClean="0"/>
-              <a:t>10/19/2026</a:t>
+              <a:t>10/20/2026</a:t>
             </a:fld>
             <a:endParaRPr lang="en-US"/>
           </a:p>
@@ -1290,7 +1288,7 @@
           <a:p>
             <a:fld id="{5BCAD085-E8A6-8845-BD4E-CB4CCA059FC4}" type="datetimeFigureOut">
               <a:rPr lang="en-US" smtClean="0"/>
-              <a:t>10/19/2026</a:t>
+              <a:t>10/20/2026</a:t>
             </a:fld>
             <a:endParaRPr lang="en-US"/>
           </a:p>
@@ -1468,7 +1466,7 @@
           <a:p>
             <a:fld id="{5BCAD085-E8A6-8845-BD4E-CB4CCA059FC4}" type="datetimeFigureOut">
               <a:rPr lang="en-US" smtClean="0"/>
-              <a:t>10/19/2026</a:t>
+              <a:t>10/20/2026</a:t>
             </a:fld>
             <a:endParaRPr lang="en-US"/>
           </a:p>
@@ -1636,7 +1634,7 @@
           <a:p>
             <a:fld id="{5BCAD085-E8A6-8845-BD4E-CB4CCA059FC4}" type="datetimeFigureOut">
               <a:rPr lang="en-US" smtClean="0"/>
-              <a:t>10/19/2026</a:t>
+              <a:t>10/20/2026</a:t>
             </a:fld>
             <a:endParaRPr lang="en-US"/>
           </a:p>
@@ -1881,7 +1879,7 @@
           <a:p>
             <a:fld id="{5BCAD085-E8A6-8845-BD4E-CB4CCA059FC4}" type="datetimeFigureOut">
               <a:rPr lang="en-US" smtClean="0"/>
-              <a:t>10/19/2026</a:t>
+              <a:t>10/20/2026</a:t>
             </a:fld>
             <a:endParaRPr lang="en-US"/>
           </a:p>
@@ -2166,7 +2164,7 @@
           <a:p>
             <a:fld id="{5BCAD085-E8A6-8845-BD4E-CB4CCA059FC4}" type="datetimeFigureOut">
               <a:rPr lang="en-US" smtClean="0"/>
-              <a:t>10/19/2026</a:t>
+              <a:t>10/20/2026</a:t>
             </a:fld>
             <a:endParaRPr lang="en-US"/>
           </a:p>
@@ -2585,7 +2583,7 @@
           <a:p>
             <a:fld id="{5BCAD085-E8A6-8845-BD4E-CB4CCA059FC4}" type="datetimeFigureOut">
               <a:rPr lang="en-US" smtClean="0"/>
-              <a:t>10/19/2026</a:t>
+              <a:t>10/20/2026</a:t>
             </a:fld>
             <a:endParaRPr lang="en-US"/>
           </a:p>
@@ -2702,7 +2700,7 @@
           <a:p>
             <a:fld id="{5BCAD085-E8A6-8845-BD4E-CB4CCA059FC4}" type="datetimeFigureOut">
               <a:rPr lang="en-US" smtClean="0"/>
-              <a:t>10/19/2026</a:t>
+              <a:t>10/20/2026</a:t>
             </a:fld>
             <a:endParaRPr lang="en-US"/>
           </a:p>
@@ -2797,7 +2795,7 @@
           <a:p>
             <a:fld id="{5BCAD085-E8A6-8845-BD4E-CB4CCA059FC4}" type="datetimeFigureOut">
               <a:rPr lang="en-US" smtClean="0"/>
-              <a:t>10/19/2026</a:t>
+              <a:t>10/20/2026</a:t>
             </a:fld>
             <a:endParaRPr lang="en-US"/>
           </a:p>
@@ -3072,7 +3070,7 @@
           <a:p>
             <a:fld id="{5BCAD085-E8A6-8845-BD4E-CB4CCA059FC4}" type="datetimeFigureOut">
               <a:rPr lang="en-US" smtClean="0"/>
-              <a:t>10/19/2026</a:t>
+              <a:t>10/20/2026</a:t>
             </a:fld>
             <a:endParaRPr lang="en-US"/>
           </a:p>
@@ -3324,7 +3322,7 @@
           <a:p>
             <a:fld id="{5BCAD085-E8A6-8845-BD4E-CB4CCA059FC4}" type="datetimeFigureOut">
               <a:rPr lang="en-US" smtClean="0"/>
-              <a:t>10/19/2026</a:t>
+              <a:t>10/20/2026</a:t>
             </a:fld>
             <a:endParaRPr lang="en-US"/>
           </a:p>
@@ -3535,7 +3533,7 @@
           <a:p>
             <a:fld id="{5BCAD085-E8A6-8845-BD4E-CB4CCA059FC4}" type="datetimeFigureOut">
               <a:rPr lang="en-US" smtClean="0"/>
-              <a:t>10/19/2026</a:t>
+              <a:t>10/20/2026</a:t>
             </a:fld>
             <a:endParaRPr lang="en-US"/>
           </a:p>
